--- a/reports/sk-hynix-2026Q1.pptx
+++ b/reports/sk-hynix-2026Q1.pptx
@@ -17,6 +17,7 @@
     <p:sldId id="265" r:id="rId16"/>
     <p:sldId id="266" r:id="rId17"/>
     <p:sldId id="267" r:id="rId18"/>
+    <p:sldId id="268" r:id="rId19"/>
   </p:sldIdLst>
   <p:sldSz cx="12191695" cy="6858000" type="screen4x3"/>
   <p:notesSz cx="6858000" cy="9144000"/>
@@ -4264,7 +4265,7 @@
                 <a:latin typeface="Pretendard"/>
                 <a:ea typeface="Pretendard"/>
               </a:rPr>
-              <a:t>05 · 사업 현황 · 전망</a:t>
+              <a:t>참고 · 연간 실적</a:t>
             </a:r>
           </a:p>
         </p:txBody>
@@ -4310,7 +4311,7 @@
                 <a:latin typeface="Pretendard"/>
                 <a:ea typeface="Pretendard"/>
               </a:rPr>
-              <a:t>핵심 하이라이트 · 전망</a:t>
+              <a:t>2025년 연간 실적 (참고)</a:t>
             </a:r>
           </a:p>
         </p:txBody>
@@ -4356,7 +4357,7 @@
                 <a:latin typeface="Pretendard"/>
                 <a:ea typeface="Pretendard"/>
               </a:rPr>
-              <a:t>AI 인프라 투자 확대가 메모리 수요를 견인</a:t>
+              <a:t>연간 누적 기준 (단위: 조원) · 연간 사상 최대</a:t>
             </a:r>
           </a:p>
         </p:txBody>
@@ -4449,604 +4450,30 @@
           </a:p>
         </p:txBody>
       </p:sp>
-      <p:sp>
-        <p:nvSpPr>
-          <p:cNvPr id="7" name="TextBox 6"/>
-          <p:cNvSpPr txBox="1"/>
-          <p:nvPr/>
-        </p:nvSpPr>
-        <p:spPr>
-          <a:xfrm>
-            <a:off x="566928" y="2697480"/>
-            <a:ext cx="3017520" cy="3291840"/>
-          </a:xfrm>
-          <a:prstGeom prst="rect">
-            <a:avLst/>
-          </a:prstGeom>
-          <a:noFill/>
-        </p:spPr>
-        <p:txBody>
-          <a:bodyPr wrap="square" anchor="t" lIns="0" rIns="0" tIns="0" bIns="0">
-            <a:spAutoFit/>
-          </a:bodyPr>
-          <a:lstStyle/>
-          <a:p>
-            <a:pPr algn="l">
-              <a:lnSpc>
-                <a:spcPct val="150000"/>
-              </a:lnSpc>
-              <a:spcBef>
-                <a:spcPts val="0"/>
-              </a:spcBef>
-              <a:spcAft>
-                <a:spcPts val="0"/>
-              </a:spcAft>
-            </a:pPr>
-            <a:r>
-              <a:rPr sz="1250" b="0">
-                <a:solidFill>
-                  <a:srgbClr val="55565A"/>
-                </a:solidFill>
-                <a:latin typeface="Pretendard"/>
-                <a:ea typeface="Pretendard"/>
-              </a:rPr>
-              <a:t>AI 데이터센터 수요가 향후 3년 생산능력 계획을 이미 초과하고 있습니다.</a:t>
-            </a:r>
-          </a:p>
-        </p:txBody>
-      </p:sp>
-      <p:sp>
-        <p:nvSpPr>
-          <p:cNvPr id="8" name="TextBox 7"/>
-          <p:cNvSpPr txBox="1"/>
-          <p:nvPr/>
-        </p:nvSpPr>
-        <p:spPr>
-          <a:xfrm>
-            <a:off x="4023360" y="2651760"/>
-            <a:ext cx="868680" cy="548640"/>
-          </a:xfrm>
-          <a:prstGeom prst="rect">
-            <a:avLst/>
-          </a:prstGeom>
-          <a:noFill/>
-        </p:spPr>
-        <p:txBody>
-          <a:bodyPr wrap="square" anchor="t" lIns="0" rIns="0" tIns="0" bIns="0">
-            <a:spAutoFit/>
-          </a:bodyPr>
-          <a:lstStyle/>
-          <a:p>
-            <a:pPr algn="l">
-              <a:lnSpc>
-                <a:spcPct val="115000"/>
-              </a:lnSpc>
-              <a:spcBef>
-                <a:spcPts val="0"/>
-              </a:spcBef>
-              <a:spcAft>
-                <a:spcPts val="0"/>
-              </a:spcAft>
-            </a:pPr>
-            <a:r>
-              <a:rPr sz="2100" b="1">
-                <a:solidFill>
-                  <a:srgbClr val="EA002C"/>
-                </a:solidFill>
-                <a:latin typeface="Pretendard"/>
-                <a:ea typeface="Pretendard"/>
-              </a:rPr>
-              <a:t>01</a:t>
-            </a:r>
-          </a:p>
-        </p:txBody>
-      </p:sp>
-      <p:sp>
-        <p:nvSpPr>
-          <p:cNvPr id="9" name="TextBox 8"/>
-          <p:cNvSpPr txBox="1"/>
-          <p:nvPr/>
-        </p:nvSpPr>
-        <p:spPr>
-          <a:xfrm>
-            <a:off x="4937760" y="2651760"/>
-            <a:ext cx="6675119" cy="384048"/>
-          </a:xfrm>
-          <a:prstGeom prst="rect">
-            <a:avLst/>
-          </a:prstGeom>
-          <a:noFill/>
-        </p:spPr>
-        <p:txBody>
-          <a:bodyPr wrap="square" anchor="t" lIns="0" rIns="0" tIns="0" bIns="0">
-            <a:spAutoFit/>
-          </a:bodyPr>
-          <a:lstStyle/>
-          <a:p>
-            <a:pPr algn="l">
-              <a:lnSpc>
-                <a:spcPct val="115000"/>
-              </a:lnSpc>
-              <a:spcBef>
-                <a:spcPts val="0"/>
-              </a:spcBef>
-              <a:spcAft>
-                <a:spcPts val="0"/>
-              </a:spcAft>
-            </a:pPr>
-            <a:r>
-              <a:rPr sz="1400" b="1">
-                <a:solidFill>
-                  <a:srgbClr val="1A1A1A"/>
-                </a:solidFill>
-                <a:latin typeface="Pretendard"/>
-                <a:ea typeface="Pretendard"/>
-              </a:rPr>
-              <a:t>분기 최대 실적</a:t>
-            </a:r>
-          </a:p>
-        </p:txBody>
-      </p:sp>
-      <p:sp>
-        <p:nvSpPr>
-          <p:cNvPr id="10" name="TextBox 9"/>
-          <p:cNvSpPr txBox="1"/>
-          <p:nvPr/>
-        </p:nvSpPr>
-        <p:spPr>
-          <a:xfrm>
-            <a:off x="4937760" y="3035808"/>
-            <a:ext cx="6675119" cy="422910"/>
-          </a:xfrm>
-          <a:prstGeom prst="rect">
-            <a:avLst/>
-          </a:prstGeom>
-          <a:noFill/>
-        </p:spPr>
-        <p:txBody>
-          <a:bodyPr wrap="square" anchor="t" lIns="0" rIns="0" tIns="0" bIns="0">
-            <a:spAutoFit/>
-          </a:bodyPr>
-          <a:lstStyle/>
-          <a:p>
-            <a:pPr algn="l">
-              <a:lnSpc>
-                <a:spcPct val="132000"/>
-              </a:lnSpc>
-              <a:spcBef>
-                <a:spcPts val="0"/>
-              </a:spcBef>
-              <a:spcAft>
-                <a:spcPts val="0"/>
-              </a:spcAft>
-            </a:pPr>
-            <a:r>
-              <a:rPr sz="1150" b="0">
-                <a:solidFill>
-                  <a:srgbClr val="55565A"/>
-                </a:solidFill>
-                <a:latin typeface="Pretendard"/>
-                <a:ea typeface="Pretendard"/>
-              </a:rPr>
-              <a:t>매출 최초 50조원 돌파, 영업이익·이익률(72%) 창사 이래 최고.</a:t>
-            </a:r>
-          </a:p>
-        </p:txBody>
-      </p:sp>
-      <p:sp>
-        <p:nvSpPr>
-          <p:cNvPr id="11" name="TextBox 10"/>
-          <p:cNvSpPr txBox="1"/>
-          <p:nvPr/>
-        </p:nvSpPr>
-        <p:spPr>
-          <a:xfrm>
-            <a:off x="4023360" y="3531870"/>
-            <a:ext cx="868680" cy="548640"/>
-          </a:xfrm>
-          <a:prstGeom prst="rect">
-            <a:avLst/>
-          </a:prstGeom>
-          <a:noFill/>
-        </p:spPr>
-        <p:txBody>
-          <a:bodyPr wrap="square" anchor="t" lIns="0" rIns="0" tIns="0" bIns="0">
-            <a:spAutoFit/>
-          </a:bodyPr>
-          <a:lstStyle/>
-          <a:p>
-            <a:pPr algn="l">
-              <a:lnSpc>
-                <a:spcPct val="115000"/>
-              </a:lnSpc>
-              <a:spcBef>
-                <a:spcPts val="0"/>
-              </a:spcBef>
-              <a:spcAft>
-                <a:spcPts val="0"/>
-              </a:spcAft>
-            </a:pPr>
-            <a:r>
-              <a:rPr sz="2100" b="1">
-                <a:solidFill>
-                  <a:srgbClr val="EA002C"/>
-                </a:solidFill>
-                <a:latin typeface="Pretendard"/>
-                <a:ea typeface="Pretendard"/>
-              </a:rPr>
-              <a:t>02</a:t>
-            </a:r>
-          </a:p>
-        </p:txBody>
-      </p:sp>
-      <p:sp>
-        <p:nvSpPr>
-          <p:cNvPr id="12" name="TextBox 11"/>
-          <p:cNvSpPr txBox="1"/>
-          <p:nvPr/>
-        </p:nvSpPr>
-        <p:spPr>
-          <a:xfrm>
-            <a:off x="4937760" y="3531870"/>
-            <a:ext cx="6675119" cy="384048"/>
-          </a:xfrm>
-          <a:prstGeom prst="rect">
-            <a:avLst/>
-          </a:prstGeom>
-          <a:noFill/>
-        </p:spPr>
-        <p:txBody>
-          <a:bodyPr wrap="square" anchor="t" lIns="0" rIns="0" tIns="0" bIns="0">
-            <a:spAutoFit/>
-          </a:bodyPr>
-          <a:lstStyle/>
-          <a:p>
-            <a:pPr algn="l">
-              <a:lnSpc>
-                <a:spcPct val="115000"/>
-              </a:lnSpc>
-              <a:spcBef>
-                <a:spcPts val="0"/>
-              </a:spcBef>
-              <a:spcAft>
-                <a:spcPts val="0"/>
-              </a:spcAft>
-            </a:pPr>
-            <a:r>
-              <a:rPr sz="1400" b="1">
-                <a:solidFill>
-                  <a:srgbClr val="1A1A1A"/>
-                </a:solidFill>
-                <a:latin typeface="Pretendard"/>
-                <a:ea typeface="Pretendard"/>
-              </a:rPr>
-              <a:t>HBM 리더십</a:t>
-            </a:r>
-          </a:p>
-        </p:txBody>
-      </p:sp>
-      <p:sp>
-        <p:nvSpPr>
-          <p:cNvPr id="13" name="TextBox 12"/>
-          <p:cNvSpPr txBox="1"/>
-          <p:nvPr/>
-        </p:nvSpPr>
-        <p:spPr>
-          <a:xfrm>
-            <a:off x="4937760" y="3915918"/>
-            <a:ext cx="6675119" cy="422910"/>
-          </a:xfrm>
-          <a:prstGeom prst="rect">
-            <a:avLst/>
-          </a:prstGeom>
-          <a:noFill/>
-        </p:spPr>
-        <p:txBody>
-          <a:bodyPr wrap="square" anchor="t" lIns="0" rIns="0" tIns="0" bIns="0">
-            <a:spAutoFit/>
-          </a:bodyPr>
-          <a:lstStyle/>
-          <a:p>
-            <a:pPr algn="l">
-              <a:lnSpc>
-                <a:spcPct val="132000"/>
-              </a:lnSpc>
-              <a:spcBef>
-                <a:spcPts val="0"/>
-              </a:spcBef>
-              <a:spcAft>
-                <a:spcPts val="0"/>
-              </a:spcAft>
-            </a:pPr>
-            <a:r>
-              <a:rPr sz="1150" b="0">
-                <a:solidFill>
-                  <a:srgbClr val="55565A"/>
-                </a:solidFill>
-                <a:latin typeface="Pretendard"/>
-                <a:ea typeface="Pretendard"/>
-              </a:rPr>
-              <a:t>HBM 시장 점유율 58%로 글로벌 1위 유지, 실적을 견인.</a:t>
-            </a:r>
-          </a:p>
-        </p:txBody>
-      </p:sp>
-      <p:sp>
-        <p:nvSpPr>
-          <p:cNvPr id="14" name="TextBox 13"/>
-          <p:cNvSpPr txBox="1"/>
-          <p:nvPr/>
-        </p:nvSpPr>
-        <p:spPr>
-          <a:xfrm>
-            <a:off x="4023360" y="4411980"/>
-            <a:ext cx="868680" cy="548640"/>
-          </a:xfrm>
-          <a:prstGeom prst="rect">
-            <a:avLst/>
-          </a:prstGeom>
-          <a:noFill/>
-        </p:spPr>
-        <p:txBody>
-          <a:bodyPr wrap="square" anchor="t" lIns="0" rIns="0" tIns="0" bIns="0">
-            <a:spAutoFit/>
-          </a:bodyPr>
-          <a:lstStyle/>
-          <a:p>
-            <a:pPr algn="l">
-              <a:lnSpc>
-                <a:spcPct val="115000"/>
-              </a:lnSpc>
-              <a:spcBef>
-                <a:spcPts val="0"/>
-              </a:spcBef>
-              <a:spcAft>
-                <a:spcPts val="0"/>
-              </a:spcAft>
-            </a:pPr>
-            <a:r>
-              <a:rPr sz="2100" b="1">
-                <a:solidFill>
-                  <a:srgbClr val="EA002C"/>
-                </a:solidFill>
-                <a:latin typeface="Pretendard"/>
-                <a:ea typeface="Pretendard"/>
-              </a:rPr>
-              <a:t>03</a:t>
-            </a:r>
-          </a:p>
-        </p:txBody>
-      </p:sp>
-      <p:sp>
-        <p:nvSpPr>
-          <p:cNvPr id="15" name="TextBox 14"/>
-          <p:cNvSpPr txBox="1"/>
-          <p:nvPr/>
-        </p:nvSpPr>
-        <p:spPr>
-          <a:xfrm>
-            <a:off x="4937760" y="4411980"/>
-            <a:ext cx="6675119" cy="384048"/>
-          </a:xfrm>
-          <a:prstGeom prst="rect">
-            <a:avLst/>
-          </a:prstGeom>
-          <a:noFill/>
-        </p:spPr>
-        <p:txBody>
-          <a:bodyPr wrap="square" anchor="t" lIns="0" rIns="0" tIns="0" bIns="0">
-            <a:spAutoFit/>
-          </a:bodyPr>
-          <a:lstStyle/>
-          <a:p>
-            <a:pPr algn="l">
-              <a:lnSpc>
-                <a:spcPct val="115000"/>
-              </a:lnSpc>
-              <a:spcBef>
-                <a:spcPts val="0"/>
-              </a:spcBef>
-              <a:spcAft>
-                <a:spcPts val="0"/>
-              </a:spcAft>
-            </a:pPr>
-            <a:r>
-              <a:rPr sz="1400" b="1">
-                <a:solidFill>
-                  <a:srgbClr val="1A1A1A"/>
-                </a:solidFill>
-                <a:latin typeface="Pretendard"/>
-                <a:ea typeface="Pretendard"/>
-              </a:rPr>
-              <a:t>차세대 로드맵</a:t>
-            </a:r>
-          </a:p>
-        </p:txBody>
-      </p:sp>
-      <p:sp>
-        <p:nvSpPr>
-          <p:cNvPr id="16" name="TextBox 15"/>
-          <p:cNvSpPr txBox="1"/>
-          <p:nvPr/>
-        </p:nvSpPr>
-        <p:spPr>
-          <a:xfrm>
-            <a:off x="4937760" y="4796028"/>
-            <a:ext cx="6675119" cy="422910"/>
-          </a:xfrm>
-          <a:prstGeom prst="rect">
-            <a:avLst/>
-          </a:prstGeom>
-          <a:noFill/>
-        </p:spPr>
-        <p:txBody>
-          <a:bodyPr wrap="square" anchor="t" lIns="0" rIns="0" tIns="0" bIns="0">
-            <a:spAutoFit/>
-          </a:bodyPr>
-          <a:lstStyle/>
-          <a:p>
-            <a:pPr algn="l">
-              <a:lnSpc>
-                <a:spcPct val="132000"/>
-              </a:lnSpc>
-              <a:spcBef>
-                <a:spcPts val="0"/>
-              </a:spcBef>
-              <a:spcAft>
-                <a:spcPts val="0"/>
-              </a:spcAft>
-            </a:pPr>
-            <a:r>
-              <a:rPr sz="1150" b="0">
-                <a:solidFill>
-                  <a:srgbClr val="55565A"/>
-                </a:solidFill>
-                <a:latin typeface="Pretendard"/>
-                <a:ea typeface="Pretendard"/>
-              </a:rPr>
-              <a:t>HBM4E(7세대) 2026년 하반기 샘플링, 2027년 양산 목표.</a:t>
-            </a:r>
-          </a:p>
-        </p:txBody>
-      </p:sp>
-      <p:sp>
-        <p:nvSpPr>
-          <p:cNvPr id="17" name="TextBox 16"/>
-          <p:cNvSpPr txBox="1"/>
-          <p:nvPr/>
-        </p:nvSpPr>
-        <p:spPr>
-          <a:xfrm>
-            <a:off x="4023360" y="5292090"/>
-            <a:ext cx="868680" cy="548640"/>
-          </a:xfrm>
-          <a:prstGeom prst="rect">
-            <a:avLst/>
-          </a:prstGeom>
-          <a:noFill/>
-        </p:spPr>
-        <p:txBody>
-          <a:bodyPr wrap="square" anchor="t" lIns="0" rIns="0" tIns="0" bIns="0">
-            <a:spAutoFit/>
-          </a:bodyPr>
-          <a:lstStyle/>
-          <a:p>
-            <a:pPr algn="l">
-              <a:lnSpc>
-                <a:spcPct val="115000"/>
-              </a:lnSpc>
-              <a:spcBef>
-                <a:spcPts val="0"/>
-              </a:spcBef>
-              <a:spcAft>
-                <a:spcPts val="0"/>
-              </a:spcAft>
-            </a:pPr>
-            <a:r>
-              <a:rPr sz="2100" b="1">
-                <a:solidFill>
-                  <a:srgbClr val="EA002C"/>
-                </a:solidFill>
-                <a:latin typeface="Pretendard"/>
-                <a:ea typeface="Pretendard"/>
-              </a:rPr>
-              <a:t>04</a:t>
-            </a:r>
-          </a:p>
-        </p:txBody>
-      </p:sp>
-      <p:sp>
-        <p:nvSpPr>
-          <p:cNvPr id="18" name="TextBox 17"/>
-          <p:cNvSpPr txBox="1"/>
-          <p:nvPr/>
-        </p:nvSpPr>
-        <p:spPr>
-          <a:xfrm>
-            <a:off x="4937760" y="5292090"/>
-            <a:ext cx="6675119" cy="384048"/>
-          </a:xfrm>
-          <a:prstGeom prst="rect">
-            <a:avLst/>
-          </a:prstGeom>
-          <a:noFill/>
-        </p:spPr>
-        <p:txBody>
-          <a:bodyPr wrap="square" anchor="t" lIns="0" rIns="0" tIns="0" bIns="0">
-            <a:spAutoFit/>
-          </a:bodyPr>
-          <a:lstStyle/>
-          <a:p>
-            <a:pPr algn="l">
-              <a:lnSpc>
-                <a:spcPct val="115000"/>
-              </a:lnSpc>
-              <a:spcBef>
-                <a:spcPts val="0"/>
-              </a:spcBef>
-              <a:spcAft>
-                <a:spcPts val="0"/>
-              </a:spcAft>
-            </a:pPr>
-            <a:r>
-              <a:rPr sz="1400" b="1">
-                <a:solidFill>
-                  <a:srgbClr val="1A1A1A"/>
-                </a:solidFill>
-                <a:latin typeface="Pretendard"/>
-                <a:ea typeface="Pretendard"/>
-              </a:rPr>
-              <a:t>재무 개선</a:t>
-            </a:r>
-          </a:p>
-        </p:txBody>
-      </p:sp>
-      <p:sp>
-        <p:nvSpPr>
-          <p:cNvPr id="19" name="TextBox 18"/>
-          <p:cNvSpPr txBox="1"/>
-          <p:nvPr/>
-        </p:nvSpPr>
-        <p:spPr>
-          <a:xfrm>
-            <a:off x="4937760" y="5676138"/>
-            <a:ext cx="6675119" cy="422910"/>
-          </a:xfrm>
-          <a:prstGeom prst="rect">
-            <a:avLst/>
-          </a:prstGeom>
-          <a:noFill/>
-        </p:spPr>
-        <p:txBody>
-          <a:bodyPr wrap="square" anchor="t" lIns="0" rIns="0" tIns="0" bIns="0">
-            <a:spAutoFit/>
-          </a:bodyPr>
-          <a:lstStyle/>
-          <a:p>
-            <a:pPr algn="l">
-              <a:lnSpc>
-                <a:spcPct val="132000"/>
-              </a:lnSpc>
-              <a:spcBef>
-                <a:spcPts val="0"/>
-              </a:spcBef>
-              <a:spcAft>
-                <a:spcPts val="0"/>
-              </a:spcAft>
-            </a:pPr>
-            <a:r>
-              <a:rPr sz="1150" b="0">
-                <a:solidFill>
-                  <a:srgbClr val="55565A"/>
-                </a:solidFill>
-                <a:latin typeface="Pretendard"/>
-                <a:ea typeface="Pretendard"/>
-              </a:rPr>
-              <a:t>순현금 35조원 확보로 투자 여력과 안정성 강화.</a:t>
-            </a:r>
-          </a:p>
-        </p:txBody>
-      </p:sp>
+      <p:pic>
+        <p:nvPicPr>
+          <p:cNvPr id="7" name="Picture 6" descr="table_5.png"/>
+          <p:cNvPicPr>
+            <a:picLocks noChangeAspect="1"/>
+          </p:cNvPicPr>
+          <p:nvPr/>
+        </p:nvPicPr>
+        <p:blipFill>
+          <a:blip r:embed="rId2"/>
+          <a:stretch>
+            <a:fillRect/>
+          </a:stretch>
+        </p:blipFill>
+        <p:spPr>
+          <a:xfrm>
+            <a:off x="1949252" y="2468880"/>
+            <a:ext cx="8299591" cy="3657600"/>
+          </a:xfrm>
+          <a:prstGeom prst="rect">
+            <a:avLst/>
+          </a:prstGeom>
+        </p:spPr>
+      </p:pic>
     </p:spTree>
   </p:cSld>
   <p:clrMapOvr>
@@ -5056,6 +4483,856 @@
 </file>
 
 <file path=ppt/slides/slide12.xml><?xml version="1.0" encoding="utf-8"?>
+<p:sld xmlns:a="http://schemas.openxmlformats.org/drawingml/2006/main" xmlns:p="http://schemas.openxmlformats.org/presentationml/2006/main" xmlns:r="http://schemas.openxmlformats.org/officeDocument/2006/relationships">
+  <p:cSld>
+    <p:bg>
+      <p:bgPr>
+        <a:solidFill>
+          <a:srgbClr val="FFFFFF"/>
+        </a:solidFill>
+        <a:effectLst/>
+      </p:bgPr>
+    </p:bg>
+    <p:spTree>
+      <p:nvGrpSpPr>
+        <p:cNvPr id="1" name=""/>
+        <p:cNvGrpSpPr/>
+        <p:nvPr/>
+      </p:nvGrpSpPr>
+      <p:grpSpPr/>
+      <p:sp>
+        <p:nvSpPr>
+          <p:cNvPr id="2" name="TextBox 1"/>
+          <p:cNvSpPr txBox="1"/>
+          <p:nvPr/>
+        </p:nvSpPr>
+        <p:spPr>
+          <a:xfrm>
+            <a:off x="566928" y="402336"/>
+            <a:ext cx="8686800" cy="292608"/>
+          </a:xfrm>
+          <a:prstGeom prst="rect">
+            <a:avLst/>
+          </a:prstGeom>
+          <a:noFill/>
+        </p:spPr>
+        <p:txBody>
+          <a:bodyPr wrap="square" anchor="t" lIns="0" rIns="0" tIns="0" bIns="0">
+            <a:spAutoFit/>
+          </a:bodyPr>
+          <a:lstStyle/>
+          <a:p>
+            <a:pPr algn="l">
+              <a:lnSpc>
+                <a:spcPct val="115000"/>
+              </a:lnSpc>
+              <a:spcBef>
+                <a:spcPts val="0"/>
+              </a:spcBef>
+              <a:spcAft>
+                <a:spcPts val="0"/>
+              </a:spcAft>
+            </a:pPr>
+            <a:r>
+              <a:rPr sz="1100" b="1" spc="120">
+                <a:solidFill>
+                  <a:srgbClr val="EA002C"/>
+                </a:solidFill>
+                <a:latin typeface="Pretendard"/>
+                <a:ea typeface="Pretendard"/>
+              </a:rPr>
+              <a:t>05 · 사업 현황 · 전망</a:t>
+            </a:r>
+          </a:p>
+        </p:txBody>
+      </p:sp>
+      <p:sp>
+        <p:nvSpPr>
+          <p:cNvPr id="3" name="TextBox 2"/>
+          <p:cNvSpPr txBox="1"/>
+          <p:nvPr/>
+        </p:nvSpPr>
+        <p:spPr>
+          <a:xfrm>
+            <a:off x="566928" y="841248"/>
+            <a:ext cx="11064240" cy="914400"/>
+          </a:xfrm>
+          <a:prstGeom prst="rect">
+            <a:avLst/>
+          </a:prstGeom>
+          <a:noFill/>
+        </p:spPr>
+        <p:txBody>
+          <a:bodyPr wrap="square" anchor="t" lIns="0" rIns="0" tIns="0" bIns="0">
+            <a:spAutoFit/>
+          </a:bodyPr>
+          <a:lstStyle/>
+          <a:p>
+            <a:pPr algn="l">
+              <a:lnSpc>
+                <a:spcPct val="115000"/>
+              </a:lnSpc>
+              <a:spcBef>
+                <a:spcPts val="0"/>
+              </a:spcBef>
+              <a:spcAft>
+                <a:spcPts val="0"/>
+              </a:spcAft>
+            </a:pPr>
+            <a:r>
+              <a:rPr sz="2500" b="1">
+                <a:solidFill>
+                  <a:srgbClr val="1A1A1A"/>
+                </a:solidFill>
+                <a:latin typeface="Pretendard"/>
+                <a:ea typeface="Pretendard"/>
+              </a:rPr>
+              <a:t>핵심 하이라이트 · 전망</a:t>
+            </a:r>
+          </a:p>
+        </p:txBody>
+      </p:sp>
+      <p:sp>
+        <p:nvSpPr>
+          <p:cNvPr id="4" name="TextBox 3"/>
+          <p:cNvSpPr txBox="1"/>
+          <p:nvPr/>
+        </p:nvSpPr>
+        <p:spPr>
+          <a:xfrm>
+            <a:off x="566928" y="1627632"/>
+            <a:ext cx="11064240" cy="548640"/>
+          </a:xfrm>
+          <a:prstGeom prst="rect">
+            <a:avLst/>
+          </a:prstGeom>
+          <a:noFill/>
+        </p:spPr>
+        <p:txBody>
+          <a:bodyPr wrap="square" anchor="t" lIns="0" rIns="0" tIns="0" bIns="0">
+            <a:spAutoFit/>
+          </a:bodyPr>
+          <a:lstStyle/>
+          <a:p>
+            <a:pPr algn="l">
+              <a:lnSpc>
+                <a:spcPct val="115000"/>
+              </a:lnSpc>
+              <a:spcBef>
+                <a:spcPts val="0"/>
+              </a:spcBef>
+              <a:spcAft>
+                <a:spcPts val="0"/>
+              </a:spcAft>
+            </a:pPr>
+            <a:r>
+              <a:rPr sz="1400" b="0">
+                <a:solidFill>
+                  <a:srgbClr val="55565A"/>
+                </a:solidFill>
+                <a:latin typeface="Pretendard"/>
+                <a:ea typeface="Pretendard"/>
+              </a:rPr>
+              <a:t>AI 인프라 투자 확대가 메모리 수요를 견인</a:t>
+            </a:r>
+          </a:p>
+        </p:txBody>
+      </p:sp>
+      <p:sp>
+        <p:nvSpPr>
+          <p:cNvPr id="5" name="Rectangle 4"/>
+          <p:cNvSpPr/>
+          <p:nvPr/>
+        </p:nvSpPr>
+        <p:spPr>
+          <a:xfrm>
+            <a:off x="566928" y="2194560"/>
+            <a:ext cx="1005840" cy="41148"/>
+          </a:xfrm>
+          <a:prstGeom prst="rect">
+            <a:avLst/>
+          </a:prstGeom>
+          <a:solidFill>
+            <a:srgbClr val="EA002C"/>
+          </a:solidFill>
+          <a:ln>
+            <a:noFill/>
+          </a:ln>
+          <a:effectLst/>
+        </p:spPr>
+        <p:style>
+          <a:lnRef idx="1">
+            <a:schemeClr val="accent1"/>
+          </a:lnRef>
+          <a:fillRef idx="3">
+            <a:schemeClr val="accent1"/>
+          </a:fillRef>
+          <a:effectRef idx="2">
+            <a:schemeClr val="accent1"/>
+          </a:effectRef>
+          <a:fontRef idx="minor">
+            <a:schemeClr val="lt1"/>
+          </a:fontRef>
+        </p:style>
+        <p:txBody>
+          <a:bodyPr rtlCol="0" anchor="ctr"/>
+          <a:lstStyle/>
+          <a:p>
+            <a:pPr algn="ctr"/>
+          </a:p>
+        </p:txBody>
+      </p:sp>
+      <p:sp>
+        <p:nvSpPr>
+          <p:cNvPr id="6" name="Rectangle 5"/>
+          <p:cNvSpPr/>
+          <p:nvPr/>
+        </p:nvSpPr>
+        <p:spPr>
+          <a:xfrm>
+            <a:off x="1572768" y="2211019"/>
+            <a:ext cx="10058400" cy="10972"/>
+          </a:xfrm>
+          <a:prstGeom prst="rect">
+            <a:avLst/>
+          </a:prstGeom>
+          <a:solidFill>
+            <a:srgbClr val="E5E5E8"/>
+          </a:solidFill>
+          <a:ln>
+            <a:noFill/>
+          </a:ln>
+          <a:effectLst/>
+        </p:spPr>
+        <p:style>
+          <a:lnRef idx="1">
+            <a:schemeClr val="accent1"/>
+          </a:lnRef>
+          <a:fillRef idx="3">
+            <a:schemeClr val="accent1"/>
+          </a:fillRef>
+          <a:effectRef idx="2">
+            <a:schemeClr val="accent1"/>
+          </a:effectRef>
+          <a:fontRef idx="minor">
+            <a:schemeClr val="lt1"/>
+          </a:fontRef>
+        </p:style>
+        <p:txBody>
+          <a:bodyPr rtlCol="0" anchor="ctr"/>
+          <a:lstStyle/>
+          <a:p>
+            <a:pPr algn="ctr"/>
+          </a:p>
+        </p:txBody>
+      </p:sp>
+      <p:sp>
+        <p:nvSpPr>
+          <p:cNvPr id="7" name="TextBox 6"/>
+          <p:cNvSpPr txBox="1"/>
+          <p:nvPr/>
+        </p:nvSpPr>
+        <p:spPr>
+          <a:xfrm>
+            <a:off x="566928" y="2697480"/>
+            <a:ext cx="3017520" cy="3291840"/>
+          </a:xfrm>
+          <a:prstGeom prst="rect">
+            <a:avLst/>
+          </a:prstGeom>
+          <a:noFill/>
+        </p:spPr>
+        <p:txBody>
+          <a:bodyPr wrap="square" anchor="t" lIns="0" rIns="0" tIns="0" bIns="0">
+            <a:spAutoFit/>
+          </a:bodyPr>
+          <a:lstStyle/>
+          <a:p>
+            <a:pPr algn="l">
+              <a:lnSpc>
+                <a:spcPct val="150000"/>
+              </a:lnSpc>
+              <a:spcBef>
+                <a:spcPts val="0"/>
+              </a:spcBef>
+              <a:spcAft>
+                <a:spcPts val="0"/>
+              </a:spcAft>
+            </a:pPr>
+            <a:r>
+              <a:rPr sz="1250" b="0">
+                <a:solidFill>
+                  <a:srgbClr val="55565A"/>
+                </a:solidFill>
+                <a:latin typeface="Pretendard"/>
+                <a:ea typeface="Pretendard"/>
+              </a:rPr>
+              <a:t>AI 데이터센터 수요가 향후 3년 생산능력 계획을 이미 초과하고 있습니다.</a:t>
+            </a:r>
+          </a:p>
+        </p:txBody>
+      </p:sp>
+      <p:sp>
+        <p:nvSpPr>
+          <p:cNvPr id="8" name="TextBox 7"/>
+          <p:cNvSpPr txBox="1"/>
+          <p:nvPr/>
+        </p:nvSpPr>
+        <p:spPr>
+          <a:xfrm>
+            <a:off x="4023360" y="2651760"/>
+            <a:ext cx="868680" cy="548640"/>
+          </a:xfrm>
+          <a:prstGeom prst="rect">
+            <a:avLst/>
+          </a:prstGeom>
+          <a:noFill/>
+        </p:spPr>
+        <p:txBody>
+          <a:bodyPr wrap="square" anchor="t" lIns="0" rIns="0" tIns="0" bIns="0">
+            <a:spAutoFit/>
+          </a:bodyPr>
+          <a:lstStyle/>
+          <a:p>
+            <a:pPr algn="l">
+              <a:lnSpc>
+                <a:spcPct val="115000"/>
+              </a:lnSpc>
+              <a:spcBef>
+                <a:spcPts val="0"/>
+              </a:spcBef>
+              <a:spcAft>
+                <a:spcPts val="0"/>
+              </a:spcAft>
+            </a:pPr>
+            <a:r>
+              <a:rPr sz="2100" b="1">
+                <a:solidFill>
+                  <a:srgbClr val="EA002C"/>
+                </a:solidFill>
+                <a:latin typeface="Pretendard"/>
+                <a:ea typeface="Pretendard"/>
+              </a:rPr>
+              <a:t>01</a:t>
+            </a:r>
+          </a:p>
+        </p:txBody>
+      </p:sp>
+      <p:sp>
+        <p:nvSpPr>
+          <p:cNvPr id="9" name="TextBox 8"/>
+          <p:cNvSpPr txBox="1"/>
+          <p:nvPr/>
+        </p:nvSpPr>
+        <p:spPr>
+          <a:xfrm>
+            <a:off x="4937760" y="2651760"/>
+            <a:ext cx="6675119" cy="384048"/>
+          </a:xfrm>
+          <a:prstGeom prst="rect">
+            <a:avLst/>
+          </a:prstGeom>
+          <a:noFill/>
+        </p:spPr>
+        <p:txBody>
+          <a:bodyPr wrap="square" anchor="t" lIns="0" rIns="0" tIns="0" bIns="0">
+            <a:spAutoFit/>
+          </a:bodyPr>
+          <a:lstStyle/>
+          <a:p>
+            <a:pPr algn="l">
+              <a:lnSpc>
+                <a:spcPct val="115000"/>
+              </a:lnSpc>
+              <a:spcBef>
+                <a:spcPts val="0"/>
+              </a:spcBef>
+              <a:spcAft>
+                <a:spcPts val="0"/>
+              </a:spcAft>
+            </a:pPr>
+            <a:r>
+              <a:rPr sz="1400" b="1">
+                <a:solidFill>
+                  <a:srgbClr val="1A1A1A"/>
+                </a:solidFill>
+                <a:latin typeface="Pretendard"/>
+                <a:ea typeface="Pretendard"/>
+              </a:rPr>
+              <a:t>분기 최대 실적</a:t>
+            </a:r>
+          </a:p>
+        </p:txBody>
+      </p:sp>
+      <p:sp>
+        <p:nvSpPr>
+          <p:cNvPr id="10" name="TextBox 9"/>
+          <p:cNvSpPr txBox="1"/>
+          <p:nvPr/>
+        </p:nvSpPr>
+        <p:spPr>
+          <a:xfrm>
+            <a:off x="4937760" y="3035808"/>
+            <a:ext cx="6675119" cy="422910"/>
+          </a:xfrm>
+          <a:prstGeom prst="rect">
+            <a:avLst/>
+          </a:prstGeom>
+          <a:noFill/>
+        </p:spPr>
+        <p:txBody>
+          <a:bodyPr wrap="square" anchor="t" lIns="0" rIns="0" tIns="0" bIns="0">
+            <a:spAutoFit/>
+          </a:bodyPr>
+          <a:lstStyle/>
+          <a:p>
+            <a:pPr algn="l">
+              <a:lnSpc>
+                <a:spcPct val="132000"/>
+              </a:lnSpc>
+              <a:spcBef>
+                <a:spcPts val="0"/>
+              </a:spcBef>
+              <a:spcAft>
+                <a:spcPts val="0"/>
+              </a:spcAft>
+            </a:pPr>
+            <a:r>
+              <a:rPr sz="1150" b="0">
+                <a:solidFill>
+                  <a:srgbClr val="55565A"/>
+                </a:solidFill>
+                <a:latin typeface="Pretendard"/>
+                <a:ea typeface="Pretendard"/>
+              </a:rPr>
+              <a:t>매출 최초 50조원 돌파, 영업이익·이익률(72%) 창사 이래 최고.</a:t>
+            </a:r>
+          </a:p>
+        </p:txBody>
+      </p:sp>
+      <p:sp>
+        <p:nvSpPr>
+          <p:cNvPr id="11" name="TextBox 10"/>
+          <p:cNvSpPr txBox="1"/>
+          <p:nvPr/>
+        </p:nvSpPr>
+        <p:spPr>
+          <a:xfrm>
+            <a:off x="4023360" y="3531870"/>
+            <a:ext cx="868680" cy="548640"/>
+          </a:xfrm>
+          <a:prstGeom prst="rect">
+            <a:avLst/>
+          </a:prstGeom>
+          <a:noFill/>
+        </p:spPr>
+        <p:txBody>
+          <a:bodyPr wrap="square" anchor="t" lIns="0" rIns="0" tIns="0" bIns="0">
+            <a:spAutoFit/>
+          </a:bodyPr>
+          <a:lstStyle/>
+          <a:p>
+            <a:pPr algn="l">
+              <a:lnSpc>
+                <a:spcPct val="115000"/>
+              </a:lnSpc>
+              <a:spcBef>
+                <a:spcPts val="0"/>
+              </a:spcBef>
+              <a:spcAft>
+                <a:spcPts val="0"/>
+              </a:spcAft>
+            </a:pPr>
+            <a:r>
+              <a:rPr sz="2100" b="1">
+                <a:solidFill>
+                  <a:srgbClr val="EA002C"/>
+                </a:solidFill>
+                <a:latin typeface="Pretendard"/>
+                <a:ea typeface="Pretendard"/>
+              </a:rPr>
+              <a:t>02</a:t>
+            </a:r>
+          </a:p>
+        </p:txBody>
+      </p:sp>
+      <p:sp>
+        <p:nvSpPr>
+          <p:cNvPr id="12" name="TextBox 11"/>
+          <p:cNvSpPr txBox="1"/>
+          <p:nvPr/>
+        </p:nvSpPr>
+        <p:spPr>
+          <a:xfrm>
+            <a:off x="4937760" y="3531870"/>
+            <a:ext cx="6675119" cy="384048"/>
+          </a:xfrm>
+          <a:prstGeom prst="rect">
+            <a:avLst/>
+          </a:prstGeom>
+          <a:noFill/>
+        </p:spPr>
+        <p:txBody>
+          <a:bodyPr wrap="square" anchor="t" lIns="0" rIns="0" tIns="0" bIns="0">
+            <a:spAutoFit/>
+          </a:bodyPr>
+          <a:lstStyle/>
+          <a:p>
+            <a:pPr algn="l">
+              <a:lnSpc>
+                <a:spcPct val="115000"/>
+              </a:lnSpc>
+              <a:spcBef>
+                <a:spcPts val="0"/>
+              </a:spcBef>
+              <a:spcAft>
+                <a:spcPts val="0"/>
+              </a:spcAft>
+            </a:pPr>
+            <a:r>
+              <a:rPr sz="1400" b="1">
+                <a:solidFill>
+                  <a:srgbClr val="1A1A1A"/>
+                </a:solidFill>
+                <a:latin typeface="Pretendard"/>
+                <a:ea typeface="Pretendard"/>
+              </a:rPr>
+              <a:t>HBM 리더십</a:t>
+            </a:r>
+          </a:p>
+        </p:txBody>
+      </p:sp>
+      <p:sp>
+        <p:nvSpPr>
+          <p:cNvPr id="13" name="TextBox 12"/>
+          <p:cNvSpPr txBox="1"/>
+          <p:nvPr/>
+        </p:nvSpPr>
+        <p:spPr>
+          <a:xfrm>
+            <a:off x="4937760" y="3915918"/>
+            <a:ext cx="6675119" cy="422910"/>
+          </a:xfrm>
+          <a:prstGeom prst="rect">
+            <a:avLst/>
+          </a:prstGeom>
+          <a:noFill/>
+        </p:spPr>
+        <p:txBody>
+          <a:bodyPr wrap="square" anchor="t" lIns="0" rIns="0" tIns="0" bIns="0">
+            <a:spAutoFit/>
+          </a:bodyPr>
+          <a:lstStyle/>
+          <a:p>
+            <a:pPr algn="l">
+              <a:lnSpc>
+                <a:spcPct val="132000"/>
+              </a:lnSpc>
+              <a:spcBef>
+                <a:spcPts val="0"/>
+              </a:spcBef>
+              <a:spcAft>
+                <a:spcPts val="0"/>
+              </a:spcAft>
+            </a:pPr>
+            <a:r>
+              <a:rPr sz="1150" b="0">
+                <a:solidFill>
+                  <a:srgbClr val="55565A"/>
+                </a:solidFill>
+                <a:latin typeface="Pretendard"/>
+                <a:ea typeface="Pretendard"/>
+              </a:rPr>
+              <a:t>HBM 시장 점유율 58%로 글로벌 1위 유지, 실적을 견인.</a:t>
+            </a:r>
+          </a:p>
+        </p:txBody>
+      </p:sp>
+      <p:sp>
+        <p:nvSpPr>
+          <p:cNvPr id="14" name="TextBox 13"/>
+          <p:cNvSpPr txBox="1"/>
+          <p:nvPr/>
+        </p:nvSpPr>
+        <p:spPr>
+          <a:xfrm>
+            <a:off x="4023360" y="4411980"/>
+            <a:ext cx="868680" cy="548640"/>
+          </a:xfrm>
+          <a:prstGeom prst="rect">
+            <a:avLst/>
+          </a:prstGeom>
+          <a:noFill/>
+        </p:spPr>
+        <p:txBody>
+          <a:bodyPr wrap="square" anchor="t" lIns="0" rIns="0" tIns="0" bIns="0">
+            <a:spAutoFit/>
+          </a:bodyPr>
+          <a:lstStyle/>
+          <a:p>
+            <a:pPr algn="l">
+              <a:lnSpc>
+                <a:spcPct val="115000"/>
+              </a:lnSpc>
+              <a:spcBef>
+                <a:spcPts val="0"/>
+              </a:spcBef>
+              <a:spcAft>
+                <a:spcPts val="0"/>
+              </a:spcAft>
+            </a:pPr>
+            <a:r>
+              <a:rPr sz="2100" b="1">
+                <a:solidFill>
+                  <a:srgbClr val="EA002C"/>
+                </a:solidFill>
+                <a:latin typeface="Pretendard"/>
+                <a:ea typeface="Pretendard"/>
+              </a:rPr>
+              <a:t>03</a:t>
+            </a:r>
+          </a:p>
+        </p:txBody>
+      </p:sp>
+      <p:sp>
+        <p:nvSpPr>
+          <p:cNvPr id="15" name="TextBox 14"/>
+          <p:cNvSpPr txBox="1"/>
+          <p:nvPr/>
+        </p:nvSpPr>
+        <p:spPr>
+          <a:xfrm>
+            <a:off x="4937760" y="4411980"/>
+            <a:ext cx="6675119" cy="384048"/>
+          </a:xfrm>
+          <a:prstGeom prst="rect">
+            <a:avLst/>
+          </a:prstGeom>
+          <a:noFill/>
+        </p:spPr>
+        <p:txBody>
+          <a:bodyPr wrap="square" anchor="t" lIns="0" rIns="0" tIns="0" bIns="0">
+            <a:spAutoFit/>
+          </a:bodyPr>
+          <a:lstStyle/>
+          <a:p>
+            <a:pPr algn="l">
+              <a:lnSpc>
+                <a:spcPct val="115000"/>
+              </a:lnSpc>
+              <a:spcBef>
+                <a:spcPts val="0"/>
+              </a:spcBef>
+              <a:spcAft>
+                <a:spcPts val="0"/>
+              </a:spcAft>
+            </a:pPr>
+            <a:r>
+              <a:rPr sz="1400" b="1">
+                <a:solidFill>
+                  <a:srgbClr val="1A1A1A"/>
+                </a:solidFill>
+                <a:latin typeface="Pretendard"/>
+                <a:ea typeface="Pretendard"/>
+              </a:rPr>
+              <a:t>차세대 로드맵</a:t>
+            </a:r>
+          </a:p>
+        </p:txBody>
+      </p:sp>
+      <p:sp>
+        <p:nvSpPr>
+          <p:cNvPr id="16" name="TextBox 15"/>
+          <p:cNvSpPr txBox="1"/>
+          <p:nvPr/>
+        </p:nvSpPr>
+        <p:spPr>
+          <a:xfrm>
+            <a:off x="4937760" y="4796028"/>
+            <a:ext cx="6675119" cy="422910"/>
+          </a:xfrm>
+          <a:prstGeom prst="rect">
+            <a:avLst/>
+          </a:prstGeom>
+          <a:noFill/>
+        </p:spPr>
+        <p:txBody>
+          <a:bodyPr wrap="square" anchor="t" lIns="0" rIns="0" tIns="0" bIns="0">
+            <a:spAutoFit/>
+          </a:bodyPr>
+          <a:lstStyle/>
+          <a:p>
+            <a:pPr algn="l">
+              <a:lnSpc>
+                <a:spcPct val="132000"/>
+              </a:lnSpc>
+              <a:spcBef>
+                <a:spcPts val="0"/>
+              </a:spcBef>
+              <a:spcAft>
+                <a:spcPts val="0"/>
+              </a:spcAft>
+            </a:pPr>
+            <a:r>
+              <a:rPr sz="1150" b="0">
+                <a:solidFill>
+                  <a:srgbClr val="55565A"/>
+                </a:solidFill>
+                <a:latin typeface="Pretendard"/>
+                <a:ea typeface="Pretendard"/>
+              </a:rPr>
+              <a:t>HBM4E(7세대) 2026년 하반기 샘플링, 2027년 양산 목표.</a:t>
+            </a:r>
+          </a:p>
+        </p:txBody>
+      </p:sp>
+      <p:sp>
+        <p:nvSpPr>
+          <p:cNvPr id="17" name="TextBox 16"/>
+          <p:cNvSpPr txBox="1"/>
+          <p:nvPr/>
+        </p:nvSpPr>
+        <p:spPr>
+          <a:xfrm>
+            <a:off x="4023360" y="5292090"/>
+            <a:ext cx="868680" cy="548640"/>
+          </a:xfrm>
+          <a:prstGeom prst="rect">
+            <a:avLst/>
+          </a:prstGeom>
+          <a:noFill/>
+        </p:spPr>
+        <p:txBody>
+          <a:bodyPr wrap="square" anchor="t" lIns="0" rIns="0" tIns="0" bIns="0">
+            <a:spAutoFit/>
+          </a:bodyPr>
+          <a:lstStyle/>
+          <a:p>
+            <a:pPr algn="l">
+              <a:lnSpc>
+                <a:spcPct val="115000"/>
+              </a:lnSpc>
+              <a:spcBef>
+                <a:spcPts val="0"/>
+              </a:spcBef>
+              <a:spcAft>
+                <a:spcPts val="0"/>
+              </a:spcAft>
+            </a:pPr>
+            <a:r>
+              <a:rPr sz="2100" b="1">
+                <a:solidFill>
+                  <a:srgbClr val="EA002C"/>
+                </a:solidFill>
+                <a:latin typeface="Pretendard"/>
+                <a:ea typeface="Pretendard"/>
+              </a:rPr>
+              <a:t>04</a:t>
+            </a:r>
+          </a:p>
+        </p:txBody>
+      </p:sp>
+      <p:sp>
+        <p:nvSpPr>
+          <p:cNvPr id="18" name="TextBox 17"/>
+          <p:cNvSpPr txBox="1"/>
+          <p:nvPr/>
+        </p:nvSpPr>
+        <p:spPr>
+          <a:xfrm>
+            <a:off x="4937760" y="5292090"/>
+            <a:ext cx="6675119" cy="384048"/>
+          </a:xfrm>
+          <a:prstGeom prst="rect">
+            <a:avLst/>
+          </a:prstGeom>
+          <a:noFill/>
+        </p:spPr>
+        <p:txBody>
+          <a:bodyPr wrap="square" anchor="t" lIns="0" rIns="0" tIns="0" bIns="0">
+            <a:spAutoFit/>
+          </a:bodyPr>
+          <a:lstStyle/>
+          <a:p>
+            <a:pPr algn="l">
+              <a:lnSpc>
+                <a:spcPct val="115000"/>
+              </a:lnSpc>
+              <a:spcBef>
+                <a:spcPts val="0"/>
+              </a:spcBef>
+              <a:spcAft>
+                <a:spcPts val="0"/>
+              </a:spcAft>
+            </a:pPr>
+            <a:r>
+              <a:rPr sz="1400" b="1">
+                <a:solidFill>
+                  <a:srgbClr val="1A1A1A"/>
+                </a:solidFill>
+                <a:latin typeface="Pretendard"/>
+                <a:ea typeface="Pretendard"/>
+              </a:rPr>
+              <a:t>재무 개선</a:t>
+            </a:r>
+          </a:p>
+        </p:txBody>
+      </p:sp>
+      <p:sp>
+        <p:nvSpPr>
+          <p:cNvPr id="19" name="TextBox 18"/>
+          <p:cNvSpPr txBox="1"/>
+          <p:nvPr/>
+        </p:nvSpPr>
+        <p:spPr>
+          <a:xfrm>
+            <a:off x="4937760" y="5676138"/>
+            <a:ext cx="6675119" cy="422910"/>
+          </a:xfrm>
+          <a:prstGeom prst="rect">
+            <a:avLst/>
+          </a:prstGeom>
+          <a:noFill/>
+        </p:spPr>
+        <p:txBody>
+          <a:bodyPr wrap="square" anchor="t" lIns="0" rIns="0" tIns="0" bIns="0">
+            <a:spAutoFit/>
+          </a:bodyPr>
+          <a:lstStyle/>
+          <a:p>
+            <a:pPr algn="l">
+              <a:lnSpc>
+                <a:spcPct val="132000"/>
+              </a:lnSpc>
+              <a:spcBef>
+                <a:spcPts val="0"/>
+              </a:spcBef>
+              <a:spcAft>
+                <a:spcPts val="0"/>
+              </a:spcAft>
+            </a:pPr>
+            <a:r>
+              <a:rPr sz="1150" b="0">
+                <a:solidFill>
+                  <a:srgbClr val="55565A"/>
+                </a:solidFill>
+                <a:latin typeface="Pretendard"/>
+                <a:ea typeface="Pretendard"/>
+              </a:rPr>
+              <a:t>순현금 35조원 확보로 투자 여력과 안정성 강화.</a:t>
+            </a:r>
+          </a:p>
+        </p:txBody>
+      </p:sp>
+    </p:spTree>
+  </p:cSld>
+  <p:clrMapOvr>
+    <a:masterClrMapping/>
+  </p:clrMapOvr>
+</p:sld>
+</file>
+
+<file path=ppt/slides/slide13.xml><?xml version="1.0" encoding="utf-8"?>
 <p:sld xmlns:a="http://schemas.openxmlformats.org/drawingml/2006/main" xmlns:p="http://schemas.openxmlformats.org/presentationml/2006/main" xmlns:r="http://schemas.openxmlformats.org/officeDocument/2006/relationships">
   <p:cSld>
     <p:bg>

--- a/reports/sk-hynix-2026Q1.pptx
+++ b/reports/sk-hynix-2026Q1.pptx
@@ -3161,7 +3161,7 @@
         <p:spPr>
           <a:xfrm>
             <a:off x="603504" y="868680"/>
-            <a:ext cx="10058400" cy="457200"/>
+            <a:ext cx="10515600" cy="457200"/>
           </a:xfrm>
           <a:prstGeom prst="rect">
             <a:avLst/>
@@ -3608,16 +3608,40 @@
           </a:p>
         </p:txBody>
       </p:sp>
-      <p:sp>
-        <p:nvSpPr>
-          <p:cNvPr id="9" name="TextBox 8"/>
+      <p:pic>
+        <p:nvPicPr>
+          <p:cNvPr id="9" name="Picture 8" descr="landmark-e564abf6.png"/>
+          <p:cNvPicPr>
+            <a:picLocks noChangeAspect="1"/>
+          </p:cNvPicPr>
+          <p:nvPr/>
+        </p:nvPicPr>
+        <p:blipFill>
+          <a:blip r:embed="rId2"/>
+          <a:stretch>
+            <a:fillRect/>
+          </a:stretch>
+        </p:blipFill>
+        <p:spPr>
+          <a:xfrm>
+            <a:off x="3425951" y="3063239"/>
+            <a:ext cx="329184" cy="329184"/>
+          </a:xfrm>
+          <a:prstGeom prst="rect">
+            <a:avLst/>
+          </a:prstGeom>
+        </p:spPr>
+      </p:pic>
+      <p:sp>
+        <p:nvSpPr>
+          <p:cNvPr id="10" name="TextBox 9"/>
           <p:cNvSpPr txBox="1"/>
           <p:nvPr/>
         </p:nvSpPr>
         <p:spPr>
           <a:xfrm>
             <a:off x="841247" y="3154679"/>
-            <a:ext cx="2895599" cy="365760"/>
+            <a:ext cx="2621279" cy="365760"/>
           </a:xfrm>
           <a:prstGeom prst="rect">
             <a:avLst/>
@@ -3656,7 +3680,7 @@
       </p:sp>
       <p:sp>
         <p:nvSpPr>
-          <p:cNvPr id="10" name="TextBox 9"/>
+          <p:cNvPr id="11" name="TextBox 10"/>
           <p:cNvSpPr txBox="1"/>
           <p:nvPr/>
         </p:nvSpPr>
@@ -3702,7 +3726,7 @@
       </p:sp>
       <p:sp>
         <p:nvSpPr>
-          <p:cNvPr id="11" name="TextBox 10"/>
+          <p:cNvPr id="12" name="TextBox 11"/>
           <p:cNvSpPr txBox="1"/>
           <p:nvPr/>
         </p:nvSpPr>
@@ -3748,7 +3772,7 @@
       </p:sp>
       <p:sp>
         <p:nvSpPr>
-          <p:cNvPr id="12" name="Rectangle 11"/>
+          <p:cNvPr id="13" name="Rectangle 12"/>
           <p:cNvSpPr/>
           <p:nvPr/>
         </p:nvSpPr>
@@ -3792,7 +3816,7 @@
       </p:sp>
       <p:sp>
         <p:nvSpPr>
-          <p:cNvPr id="13" name="Rectangle 12"/>
+          <p:cNvPr id="14" name="Rectangle 13"/>
           <p:cNvSpPr/>
           <p:nvPr/>
         </p:nvSpPr>
@@ -3834,16 +3858,40 @@
           </a:p>
         </p:txBody>
       </p:sp>
-      <p:sp>
-        <p:nvSpPr>
-          <p:cNvPr id="14" name="TextBox 13"/>
+      <p:pic>
+        <p:nvPicPr>
+          <p:cNvPr id="15" name="Picture 14" descr="landmark-e564abf6.png"/>
+          <p:cNvPicPr>
+            <a:picLocks noChangeAspect="1"/>
+          </p:cNvPicPr>
+          <p:nvPr/>
+        </p:nvPicPr>
+        <p:blipFill>
+          <a:blip r:embed="rId2"/>
+          <a:stretch>
+            <a:fillRect/>
+          </a:stretch>
+        </p:blipFill>
+        <p:spPr>
+          <a:xfrm>
+            <a:off x="7235952" y="3063239"/>
+            <a:ext cx="329184" cy="329184"/>
+          </a:xfrm>
+          <a:prstGeom prst="rect">
+            <a:avLst/>
+          </a:prstGeom>
+        </p:spPr>
+      </p:pic>
+      <p:sp>
+        <p:nvSpPr>
+          <p:cNvPr id="16" name="TextBox 15"/>
           <p:cNvSpPr txBox="1"/>
           <p:nvPr/>
         </p:nvSpPr>
         <p:spPr>
           <a:xfrm>
             <a:off x="4651247" y="3154679"/>
-            <a:ext cx="2895599" cy="365760"/>
+            <a:ext cx="2621279" cy="365760"/>
           </a:xfrm>
           <a:prstGeom prst="rect">
             <a:avLst/>
@@ -3882,7 +3930,7 @@
       </p:sp>
       <p:sp>
         <p:nvSpPr>
-          <p:cNvPr id="15" name="TextBox 14"/>
+          <p:cNvPr id="17" name="TextBox 16"/>
           <p:cNvSpPr txBox="1"/>
           <p:nvPr/>
         </p:nvSpPr>
@@ -3928,7 +3976,7 @@
       </p:sp>
       <p:sp>
         <p:nvSpPr>
-          <p:cNvPr id="16" name="TextBox 15"/>
+          <p:cNvPr id="18" name="TextBox 17"/>
           <p:cNvSpPr txBox="1"/>
           <p:nvPr/>
         </p:nvSpPr>
@@ -3974,7 +4022,7 @@
       </p:sp>
       <p:sp>
         <p:nvSpPr>
-          <p:cNvPr id="17" name="Rectangle 16"/>
+          <p:cNvPr id="19" name="Rectangle 18"/>
           <p:cNvSpPr/>
           <p:nvPr/>
         </p:nvSpPr>
@@ -4018,7 +4066,7 @@
       </p:sp>
       <p:sp>
         <p:nvSpPr>
-          <p:cNvPr id="18" name="Rectangle 17"/>
+          <p:cNvPr id="20" name="Rectangle 19"/>
           <p:cNvSpPr/>
           <p:nvPr/>
         </p:nvSpPr>
@@ -4060,16 +4108,40 @@
           </a:p>
         </p:txBody>
       </p:sp>
-      <p:sp>
-        <p:nvSpPr>
-          <p:cNvPr id="19" name="TextBox 18"/>
+      <p:pic>
+        <p:nvPicPr>
+          <p:cNvPr id="21" name="Picture 20" descr="globe-477aa68d.png"/>
+          <p:cNvPicPr>
+            <a:picLocks noChangeAspect="1"/>
+          </p:cNvPicPr>
+          <p:nvPr/>
+        </p:nvPicPr>
+        <p:blipFill>
+          <a:blip r:embed="rId3"/>
+          <a:stretch>
+            <a:fillRect/>
+          </a:stretch>
+        </p:blipFill>
+        <p:spPr>
+          <a:xfrm>
+            <a:off x="11045951" y="3063239"/>
+            <a:ext cx="329184" cy="329184"/>
+          </a:xfrm>
+          <a:prstGeom prst="rect">
+            <a:avLst/>
+          </a:prstGeom>
+        </p:spPr>
+      </p:pic>
+      <p:sp>
+        <p:nvSpPr>
+          <p:cNvPr id="22" name="TextBox 21"/>
           <p:cNvSpPr txBox="1"/>
           <p:nvPr/>
         </p:nvSpPr>
         <p:spPr>
           <a:xfrm>
             <a:off x="8461247" y="3154679"/>
-            <a:ext cx="2895599" cy="365760"/>
+            <a:ext cx="2621279" cy="365760"/>
           </a:xfrm>
           <a:prstGeom prst="rect">
             <a:avLst/>
@@ -4108,7 +4180,7 @@
       </p:sp>
       <p:sp>
         <p:nvSpPr>
-          <p:cNvPr id="20" name="TextBox 19"/>
+          <p:cNvPr id="23" name="TextBox 22"/>
           <p:cNvSpPr txBox="1"/>
           <p:nvPr/>
         </p:nvSpPr>
@@ -4154,7 +4226,7 @@
       </p:sp>
       <p:sp>
         <p:nvSpPr>
-          <p:cNvPr id="21" name="TextBox 20"/>
+          <p:cNvPr id="24" name="TextBox 23"/>
           <p:cNvSpPr txBox="1"/>
           <p:nvPr/>
         </p:nvSpPr>
@@ -5350,9 +5422,33 @@
         <p:nvPr/>
       </p:nvGrpSpPr>
       <p:grpSpPr/>
-      <p:sp>
-        <p:nvSpPr>
-          <p:cNvPr id="2" name="Rectangle 1"/>
+      <p:pic>
+        <p:nvPicPr>
+          <p:cNvPr id="2" name="Picture 1" descr="users-f1ebe5f4.png"/>
+          <p:cNvPicPr>
+            <a:picLocks noChangeAspect="1"/>
+          </p:cNvPicPr>
+          <p:nvPr/>
+        </p:nvPicPr>
+        <p:blipFill>
+          <a:blip r:embed="rId2"/>
+          <a:stretch>
+            <a:fillRect/>
+          </a:stretch>
+        </p:blipFill>
+        <p:spPr>
+          <a:xfrm>
+            <a:off x="566928" y="1828800"/>
+            <a:ext cx="566928" cy="566928"/>
+          </a:xfrm>
+          <a:prstGeom prst="rect">
+            <a:avLst/>
+          </a:prstGeom>
+        </p:spPr>
+      </p:pic>
+      <p:sp>
+        <p:nvSpPr>
+          <p:cNvPr id="3" name="Rectangle 2"/>
           <p:cNvSpPr/>
           <p:nvPr/>
         </p:nvSpPr>
@@ -5396,7 +5492,7 @@
       </p:sp>
       <p:sp>
         <p:nvSpPr>
-          <p:cNvPr id="3" name="TextBox 2"/>
+          <p:cNvPr id="4" name="TextBox 3"/>
           <p:cNvSpPr txBox="1"/>
           <p:nvPr/>
         </p:nvSpPr>
@@ -5466,7 +5562,7 @@
       </p:sp>
       <p:sp>
         <p:nvSpPr>
-          <p:cNvPr id="4" name="TextBox 3"/>
+          <p:cNvPr id="5" name="TextBox 4"/>
           <p:cNvSpPr txBox="1"/>
           <p:nvPr/>
         </p:nvSpPr>
@@ -7128,16 +7224,40 @@
           </a:p>
         </p:txBody>
       </p:sp>
-      <p:sp>
-        <p:nvSpPr>
-          <p:cNvPr id="9" name="TextBox 8"/>
+      <p:pic>
+        <p:nvPicPr>
+          <p:cNvPr id="9" name="Picture 8" descr="trending-up-9d29ea18.png"/>
+          <p:cNvPicPr>
+            <a:picLocks noChangeAspect="1"/>
+          </p:cNvPicPr>
+          <p:nvPr/>
+        </p:nvPicPr>
+        <p:blipFill>
+          <a:blip r:embed="rId2"/>
+          <a:stretch>
+            <a:fillRect/>
+          </a:stretch>
+        </p:blipFill>
+        <p:spPr>
+          <a:xfrm>
+            <a:off x="2473451" y="3063239"/>
+            <a:ext cx="329184" cy="329184"/>
+          </a:xfrm>
+          <a:prstGeom prst="rect">
+            <a:avLst/>
+          </a:prstGeom>
+        </p:spPr>
+      </p:pic>
+      <p:sp>
+        <p:nvSpPr>
+          <p:cNvPr id="10" name="TextBox 9"/>
           <p:cNvSpPr txBox="1"/>
           <p:nvPr/>
         </p:nvSpPr>
         <p:spPr>
           <a:xfrm>
             <a:off x="841247" y="3154679"/>
-            <a:ext cx="1943099" cy="365760"/>
+            <a:ext cx="1668779" cy="365760"/>
           </a:xfrm>
           <a:prstGeom prst="rect">
             <a:avLst/>
@@ -7176,7 +7296,7 @@
       </p:sp>
       <p:sp>
         <p:nvSpPr>
-          <p:cNvPr id="10" name="TextBox 9"/>
+          <p:cNvPr id="11" name="TextBox 10"/>
           <p:cNvSpPr txBox="1"/>
           <p:nvPr/>
         </p:nvSpPr>
@@ -7222,7 +7342,7 @@
       </p:sp>
       <p:sp>
         <p:nvSpPr>
-          <p:cNvPr id="11" name="TextBox 10"/>
+          <p:cNvPr id="12" name="TextBox 11"/>
           <p:cNvSpPr txBox="1"/>
           <p:nvPr/>
         </p:nvSpPr>
@@ -7268,7 +7388,7 @@
       </p:sp>
       <p:sp>
         <p:nvSpPr>
-          <p:cNvPr id="12" name="Rectangle 11"/>
+          <p:cNvPr id="13" name="Rectangle 12"/>
           <p:cNvSpPr/>
           <p:nvPr/>
         </p:nvSpPr>
@@ -7312,7 +7432,7 @@
       </p:sp>
       <p:sp>
         <p:nvSpPr>
-          <p:cNvPr id="13" name="Rectangle 12"/>
+          <p:cNvPr id="14" name="Rectangle 13"/>
           <p:cNvSpPr/>
           <p:nvPr/>
         </p:nvSpPr>
@@ -7354,16 +7474,40 @@
           </a:p>
         </p:txBody>
       </p:sp>
-      <p:sp>
-        <p:nvSpPr>
-          <p:cNvPr id="14" name="TextBox 13"/>
+      <p:pic>
+        <p:nvPicPr>
+          <p:cNvPr id="15" name="Picture 14" descr="chart-bar-2b293374.png"/>
+          <p:cNvPicPr>
+            <a:picLocks noChangeAspect="1"/>
+          </p:cNvPicPr>
+          <p:nvPr/>
+        </p:nvPicPr>
+        <p:blipFill>
+          <a:blip r:embed="rId3"/>
+          <a:stretch>
+            <a:fillRect/>
+          </a:stretch>
+        </p:blipFill>
+        <p:spPr>
+          <a:xfrm>
+            <a:off x="5330951" y="3063239"/>
+            <a:ext cx="329184" cy="329184"/>
+          </a:xfrm>
+          <a:prstGeom prst="rect">
+            <a:avLst/>
+          </a:prstGeom>
+        </p:spPr>
+      </p:pic>
+      <p:sp>
+        <p:nvSpPr>
+          <p:cNvPr id="16" name="TextBox 15"/>
           <p:cNvSpPr txBox="1"/>
           <p:nvPr/>
         </p:nvSpPr>
         <p:spPr>
           <a:xfrm>
             <a:off x="3698748" y="3154679"/>
-            <a:ext cx="1943099" cy="365760"/>
+            <a:ext cx="1668779" cy="365760"/>
           </a:xfrm>
           <a:prstGeom prst="rect">
             <a:avLst/>
@@ -7402,7 +7546,7 @@
       </p:sp>
       <p:sp>
         <p:nvSpPr>
-          <p:cNvPr id="15" name="TextBox 14"/>
+          <p:cNvPr id="17" name="TextBox 16"/>
           <p:cNvSpPr txBox="1"/>
           <p:nvPr/>
         </p:nvSpPr>
@@ -7448,7 +7592,7 @@
       </p:sp>
       <p:sp>
         <p:nvSpPr>
-          <p:cNvPr id="16" name="TextBox 15"/>
+          <p:cNvPr id="18" name="TextBox 17"/>
           <p:cNvSpPr txBox="1"/>
           <p:nvPr/>
         </p:nvSpPr>
@@ -7494,7 +7638,7 @@
       </p:sp>
       <p:sp>
         <p:nvSpPr>
-          <p:cNvPr id="17" name="Rectangle 16"/>
+          <p:cNvPr id="19" name="Rectangle 18"/>
           <p:cNvSpPr/>
           <p:nvPr/>
         </p:nvSpPr>
@@ -7538,7 +7682,7 @@
       </p:sp>
       <p:sp>
         <p:nvSpPr>
-          <p:cNvPr id="18" name="Rectangle 17"/>
+          <p:cNvPr id="20" name="Rectangle 19"/>
           <p:cNvSpPr/>
           <p:nvPr/>
         </p:nvSpPr>
@@ -7580,16 +7724,40 @@
           </a:p>
         </p:txBody>
       </p:sp>
-      <p:sp>
-        <p:nvSpPr>
-          <p:cNvPr id="19" name="TextBox 18"/>
+      <p:pic>
+        <p:nvPicPr>
+          <p:cNvPr id="21" name="Picture 20" descr="chart-bar-2b293374.png"/>
+          <p:cNvPicPr>
+            <a:picLocks noChangeAspect="1"/>
+          </p:cNvPicPr>
+          <p:nvPr/>
+        </p:nvPicPr>
+        <p:blipFill>
+          <a:blip r:embed="rId3"/>
+          <a:stretch>
+            <a:fillRect/>
+          </a:stretch>
+        </p:blipFill>
+        <p:spPr>
+          <a:xfrm>
+            <a:off x="8188451" y="3063239"/>
+            <a:ext cx="329184" cy="329184"/>
+          </a:xfrm>
+          <a:prstGeom prst="rect">
+            <a:avLst/>
+          </a:prstGeom>
+        </p:spPr>
+      </p:pic>
+      <p:sp>
+        <p:nvSpPr>
+          <p:cNvPr id="22" name="TextBox 21"/>
           <p:cNvSpPr txBox="1"/>
           <p:nvPr/>
         </p:nvSpPr>
         <p:spPr>
           <a:xfrm>
             <a:off x="6556247" y="3154679"/>
-            <a:ext cx="1943099" cy="365760"/>
+            <a:ext cx="1668779" cy="365760"/>
           </a:xfrm>
           <a:prstGeom prst="rect">
             <a:avLst/>
@@ -7628,7 +7796,7 @@
       </p:sp>
       <p:sp>
         <p:nvSpPr>
-          <p:cNvPr id="20" name="TextBox 19"/>
+          <p:cNvPr id="23" name="TextBox 22"/>
           <p:cNvSpPr txBox="1"/>
           <p:nvPr/>
         </p:nvSpPr>
@@ -7674,7 +7842,7 @@
       </p:sp>
       <p:sp>
         <p:nvSpPr>
-          <p:cNvPr id="21" name="TextBox 20"/>
+          <p:cNvPr id="24" name="TextBox 23"/>
           <p:cNvSpPr txBox="1"/>
           <p:nvPr/>
         </p:nvSpPr>
@@ -7720,7 +7888,7 @@
       </p:sp>
       <p:sp>
         <p:nvSpPr>
-          <p:cNvPr id="22" name="Rectangle 21"/>
+          <p:cNvPr id="25" name="Rectangle 24"/>
           <p:cNvSpPr/>
           <p:nvPr/>
         </p:nvSpPr>
@@ -7764,7 +7932,7 @@
       </p:sp>
       <p:sp>
         <p:nvSpPr>
-          <p:cNvPr id="23" name="Rectangle 22"/>
+          <p:cNvPr id="26" name="Rectangle 25"/>
           <p:cNvSpPr/>
           <p:nvPr/>
         </p:nvSpPr>
@@ -7806,16 +7974,40 @@
           </a:p>
         </p:txBody>
       </p:sp>
-      <p:sp>
-        <p:nvSpPr>
-          <p:cNvPr id="24" name="TextBox 23"/>
+      <p:pic>
+        <p:nvPicPr>
+          <p:cNvPr id="27" name="Picture 26" descr="chart-bar-2b293374.png"/>
+          <p:cNvPicPr>
+            <a:picLocks noChangeAspect="1"/>
+          </p:cNvPicPr>
+          <p:nvPr/>
+        </p:nvPicPr>
+        <p:blipFill>
+          <a:blip r:embed="rId3"/>
+          <a:stretch>
+            <a:fillRect/>
+          </a:stretch>
+        </p:blipFill>
+        <p:spPr>
+          <a:xfrm>
+            <a:off x="11045951" y="3063239"/>
+            <a:ext cx="329184" cy="329184"/>
+          </a:xfrm>
+          <a:prstGeom prst="rect">
+            <a:avLst/>
+          </a:prstGeom>
+        </p:spPr>
+      </p:pic>
+      <p:sp>
+        <p:nvSpPr>
+          <p:cNvPr id="28" name="TextBox 27"/>
           <p:cNvSpPr txBox="1"/>
           <p:nvPr/>
         </p:nvSpPr>
         <p:spPr>
           <a:xfrm>
             <a:off x="9413747" y="3154679"/>
-            <a:ext cx="1943099" cy="365760"/>
+            <a:ext cx="1668779" cy="365760"/>
           </a:xfrm>
           <a:prstGeom prst="rect">
             <a:avLst/>
@@ -7854,7 +8046,7 @@
       </p:sp>
       <p:sp>
         <p:nvSpPr>
-          <p:cNvPr id="25" name="TextBox 24"/>
+          <p:cNvPr id="29" name="TextBox 28"/>
           <p:cNvSpPr txBox="1"/>
           <p:nvPr/>
         </p:nvSpPr>
@@ -7900,7 +8092,7 @@
       </p:sp>
       <p:sp>
         <p:nvSpPr>
-          <p:cNvPr id="26" name="TextBox 25"/>
+          <p:cNvPr id="30" name="TextBox 29"/>
           <p:cNvSpPr txBox="1"/>
           <p:nvPr/>
         </p:nvSpPr>
